--- a/images/Presentation2.pptx
+++ b/images/Presentation2.pptx
@@ -107,7 +107,7 @@
   <p:extLst>
     <p:ext uri="{EFAFB233-063F-42B5-8137-9DF3F51BA10A}">
       <p15:sldGuideLst xmlns:p15="http://schemas.microsoft.com/office/powerpoint/2012/main">
-        <p15:guide id="1" orient="horz" pos="2160" userDrawn="1">
+        <p15:guide id="1" orient="horz" pos="288" userDrawn="1">
           <p15:clr>
             <a:srgbClr val="A4A3A4"/>
           </p15:clr>
@@ -270,7 +270,7 @@
           <a:p>
             <a:fld id="{D4CFD4AB-EE1F-9946-B7F8-E982156F3AA8}" type="datetimeFigureOut">
               <a:rPr lang="en-US" smtClean="0"/>
-              <a:t>12/24/25</a:t>
+              <a:t>4/19/26</a:t>
             </a:fld>
             <a:endParaRPr lang="en-US"/>
           </a:p>
@@ -468,7 +468,7 @@
           <a:p>
             <a:fld id="{D4CFD4AB-EE1F-9946-B7F8-E982156F3AA8}" type="datetimeFigureOut">
               <a:rPr lang="en-US" smtClean="0"/>
-              <a:t>12/24/25</a:t>
+              <a:t>4/19/26</a:t>
             </a:fld>
             <a:endParaRPr lang="en-US"/>
           </a:p>
@@ -676,7 +676,7 @@
           <a:p>
             <a:fld id="{D4CFD4AB-EE1F-9946-B7F8-E982156F3AA8}" type="datetimeFigureOut">
               <a:rPr lang="en-US" smtClean="0"/>
-              <a:t>12/24/25</a:t>
+              <a:t>4/19/26</a:t>
             </a:fld>
             <a:endParaRPr lang="en-US"/>
           </a:p>
@@ -874,7 +874,7 @@
           <a:p>
             <a:fld id="{D4CFD4AB-EE1F-9946-B7F8-E982156F3AA8}" type="datetimeFigureOut">
               <a:rPr lang="en-US" smtClean="0"/>
-              <a:t>12/24/25</a:t>
+              <a:t>4/19/26</a:t>
             </a:fld>
             <a:endParaRPr lang="en-US"/>
           </a:p>
@@ -1149,7 +1149,7 @@
           <a:p>
             <a:fld id="{D4CFD4AB-EE1F-9946-B7F8-E982156F3AA8}" type="datetimeFigureOut">
               <a:rPr lang="en-US" smtClean="0"/>
-              <a:t>12/24/25</a:t>
+              <a:t>4/19/26</a:t>
             </a:fld>
             <a:endParaRPr lang="en-US"/>
           </a:p>
@@ -1414,7 +1414,7 @@
           <a:p>
             <a:fld id="{D4CFD4AB-EE1F-9946-B7F8-E982156F3AA8}" type="datetimeFigureOut">
               <a:rPr lang="en-US" smtClean="0"/>
-              <a:t>12/24/25</a:t>
+              <a:t>4/19/26</a:t>
             </a:fld>
             <a:endParaRPr lang="en-US"/>
           </a:p>
@@ -1826,7 +1826,7 @@
           <a:p>
             <a:fld id="{D4CFD4AB-EE1F-9946-B7F8-E982156F3AA8}" type="datetimeFigureOut">
               <a:rPr lang="en-US" smtClean="0"/>
-              <a:t>12/24/25</a:t>
+              <a:t>4/19/26</a:t>
             </a:fld>
             <a:endParaRPr lang="en-US"/>
           </a:p>
@@ -1967,7 +1967,7 @@
           <a:p>
             <a:fld id="{D4CFD4AB-EE1F-9946-B7F8-E982156F3AA8}" type="datetimeFigureOut">
               <a:rPr lang="en-US" smtClean="0"/>
-              <a:t>12/24/25</a:t>
+              <a:t>4/19/26</a:t>
             </a:fld>
             <a:endParaRPr lang="en-US"/>
           </a:p>
@@ -2080,7 +2080,7 @@
           <a:p>
             <a:fld id="{D4CFD4AB-EE1F-9946-B7F8-E982156F3AA8}" type="datetimeFigureOut">
               <a:rPr lang="en-US" smtClean="0"/>
-              <a:t>12/24/25</a:t>
+              <a:t>4/19/26</a:t>
             </a:fld>
             <a:endParaRPr lang="en-US"/>
           </a:p>
@@ -2391,7 +2391,7 @@
           <a:p>
             <a:fld id="{D4CFD4AB-EE1F-9946-B7F8-E982156F3AA8}" type="datetimeFigureOut">
               <a:rPr lang="en-US" smtClean="0"/>
-              <a:t>12/24/25</a:t>
+              <a:t>4/19/26</a:t>
             </a:fld>
             <a:endParaRPr lang="en-US"/>
           </a:p>
@@ -2679,7 +2679,7 @@
           <a:p>
             <a:fld id="{D4CFD4AB-EE1F-9946-B7F8-E982156F3AA8}" type="datetimeFigureOut">
               <a:rPr lang="en-US" smtClean="0"/>
-              <a:t>12/24/25</a:t>
+              <a:t>4/19/26</a:t>
             </a:fld>
             <a:endParaRPr lang="en-US"/>
           </a:p>
@@ -2920,7 +2920,7 @@
           <a:p>
             <a:fld id="{D4CFD4AB-EE1F-9946-B7F8-E982156F3AA8}" type="datetimeFigureOut">
               <a:rPr lang="en-US" smtClean="0"/>
-              <a:t>12/24/25</a:t>
+              <a:t>4/19/26</a:t>
             </a:fld>
             <a:endParaRPr lang="en-US"/>
           </a:p>
@@ -3366,7 +3366,7 @@
         </p:blipFill>
         <p:spPr bwMode="auto">
           <a:xfrm>
-            <a:off x="2310037" y="464408"/>
+            <a:off x="9583070" y="464408"/>
             <a:ext cx="1660680" cy="2217008"/>
           </a:xfrm>
           <a:prstGeom prst="rect">
@@ -3413,7 +3413,7 @@
         </p:blipFill>
         <p:spPr bwMode="auto">
           <a:xfrm>
-            <a:off x="533943" y="464408"/>
+            <a:off x="7754516" y="464408"/>
             <a:ext cx="1673214" cy="2217008"/>
           </a:xfrm>
           <a:prstGeom prst="rect">
@@ -3460,7 +3460,7 @@
         </p:blipFill>
         <p:spPr bwMode="auto">
           <a:xfrm>
-            <a:off x="4073597" y="464408"/>
+            <a:off x="7735017" y="2792628"/>
             <a:ext cx="1749485" cy="2217008"/>
           </a:xfrm>
           <a:prstGeom prst="rect">
@@ -3548,8 +3548,8 @@
         </p:blipFill>
         <p:spPr>
           <a:xfrm>
-            <a:off x="7599176" y="316128"/>
-            <a:ext cx="3761733" cy="2550640"/>
+            <a:off x="469199" y="376618"/>
+            <a:ext cx="3526728" cy="2391295"/>
           </a:xfrm>
           <a:prstGeom prst="rect">
             <a:avLst/>
@@ -3610,8 +3610,8 @@
         </p:blipFill>
         <p:spPr>
           <a:xfrm>
-            <a:off x="2236186" y="2792628"/>
-            <a:ext cx="1777987" cy="2355506"/>
+            <a:off x="2259336" y="2792628"/>
+            <a:ext cx="1732843" cy="2295699"/>
           </a:xfrm>
           <a:prstGeom prst="rect">
             <a:avLst/>
@@ -3642,7 +3642,7 @@
         <p:spPr>
           <a:xfrm>
             <a:off x="4082704" y="2767914"/>
-            <a:ext cx="1749485" cy="2355506"/>
+            <a:ext cx="1705065" cy="2295699"/>
           </a:xfrm>
           <a:prstGeom prst="rect">
             <a:avLst/>
@@ -3682,37 +3682,6 @@
       </p:pic>
       <p:pic>
         <p:nvPicPr>
-          <p:cNvPr id="10" name="Picture 9" descr="A collection of magazines with different designs&#10;&#10;AI-generated content may be incorrect.">
-            <a:extLst>
-              <a:ext uri="{FF2B5EF4-FFF2-40B4-BE49-F238E27FC236}">
-                <a16:creationId xmlns:a16="http://schemas.microsoft.com/office/drawing/2014/main" id="{75BAB252-2BA2-F06C-5AEB-F6C97290F54A}"/>
-              </a:ext>
-            </a:extLst>
-          </p:cNvPr>
-          <p:cNvPicPr>
-            <a:picLocks noChangeAspect="1"/>
-          </p:cNvPicPr>
-          <p:nvPr/>
-        </p:nvPicPr>
-        <p:blipFill>
-          <a:blip r:embed="rId6"/>
-          <a:srcRect l="34050" t="50897" r="50168" b="2715"/>
-          <a:stretch>
-            <a:fillRect/>
-          </a:stretch>
-        </p:blipFill>
-        <p:spPr>
-          <a:xfrm>
-            <a:off x="7692865" y="2792628"/>
-            <a:ext cx="1802332" cy="2330792"/>
-          </a:xfrm>
-          <a:prstGeom prst="rect">
-            <a:avLst/>
-          </a:prstGeom>
-        </p:spPr>
-      </p:pic>
-      <p:pic>
-        <p:nvPicPr>
           <p:cNvPr id="11" name="Picture 10" descr="A collection of magazines with different designs&#10;&#10;AI-generated content may be incorrect.">
             <a:extLst>
               <a:ext uri="{FF2B5EF4-FFF2-40B4-BE49-F238E27FC236}">
@@ -3734,8 +3703,38 @@
         </p:blipFill>
         <p:spPr>
           <a:xfrm>
-            <a:off x="9512244" y="2767914"/>
+            <a:off x="4029857" y="376618"/>
             <a:ext cx="1802332" cy="2330792"/>
+          </a:xfrm>
+          <a:prstGeom prst="rect">
+            <a:avLst/>
+          </a:prstGeom>
+        </p:spPr>
+      </p:pic>
+      <p:pic>
+        <p:nvPicPr>
+          <p:cNvPr id="3" name="Picture 2">
+            <a:extLst>
+              <a:ext uri="{FF2B5EF4-FFF2-40B4-BE49-F238E27FC236}">
+                <a16:creationId xmlns:a16="http://schemas.microsoft.com/office/drawing/2014/main" id="{87A20F58-FDF1-9BE2-3AFA-8141C1FAB66E}"/>
+              </a:ext>
+            </a:extLst>
+          </p:cNvPr>
+          <p:cNvPicPr>
+            <a:picLocks noChangeAspect="1"/>
+          </p:cNvPicPr>
+          <p:nvPr/>
+        </p:nvPicPr>
+        <p:blipFill>
+          <a:blip r:embed="rId7"/>
+          <a:stretch>
+            <a:fillRect/>
+          </a:stretch>
+        </p:blipFill>
+        <p:spPr>
+          <a:xfrm>
+            <a:off x="9570535" y="2792628"/>
+            <a:ext cx="1673215" cy="2220813"/>
           </a:xfrm>
           <a:prstGeom prst="rect">
             <a:avLst/>
